--- a/10_基础会计实训/10-00_实训课怎么上_上课投影_v1.0_20260821.pptx
+++ b/10_基础会计实训/10-00_实训课怎么上_上课投影_v1.0_20260821.pptx
@@ -3484,7 +3484,7 @@
                 <a:ea typeface="微软雅黑"/>
                 <a:cs typeface="微软雅黑"/>
               </a:rPr>
-              <a:t>答案里一共 58 笔（第 1～52 笔日常，第 53～58 笔结转利润）。</a:t>
+              <a:t>为什么：15 课时里，99% 的人写不完 58 笔，更写不到本年利润。</a:t>
             </a:r>
           </a:p>
           <a:p>
@@ -3502,7 +3502,7 @@
                 <a:ea typeface="微软雅黑"/>
                 <a:cs typeface="微软雅黑"/>
               </a:rPr>
-              <a:t>15 课时里 99% 的人写不到本年利润。</a:t>
+              <a:t>所以中间段分组承包，利润结转全班一起写。每个人都写过凭证，也都过一次利润关。</a:t>
             </a:r>
           </a:p>
           <a:p>
@@ -3520,25 +3520,7 @@
                 <a:ea typeface="微软雅黑"/>
                 <a:cs typeface="微软雅黑"/>
               </a:rPr>
-              <a:t>所以：中间段分组承包，利润结转全班一起写。</a:t>
-            </a:r>
-          </a:p>
-          <a:p>
-            <a:pPr algn="l">
-              <a:spcAft>
-                <a:spcPts val="400"/>
-              </a:spcAft>
-            </a:pPr>
-            <a:r>
-              <a:rPr sz="2200" b="0">
-                <a:solidFill>
-                  <a:srgbClr val="212121"/>
-                </a:solidFill>
-                <a:latin typeface="微软雅黑"/>
-                <a:ea typeface="微软雅黑"/>
-                <a:cs typeface="微软雅黑"/>
-              </a:rPr>
-              <a:t>只认通用记账凭证。</a:t>
+              <a:t>答案里一共 58 笔（第 1～52 笔日常，第 53～58 笔结转利润）。只认通用记账凭证。</a:t>
             </a:r>
           </a:p>
         </p:txBody>

--- a/10_基础会计实训/10-00_实训课怎么上_上课投影_v1.0_20260821.pptx
+++ b/10_基础会计实训/10-00_实训课怎么上_上课投影_v1.0_20260821.pptx
@@ -4168,7 +4168,7 @@
                 <a:ea typeface="微软雅黑"/>
                 <a:cs typeface="微软雅黑"/>
               </a:rPr>
-              <a:t>资金组：1、3、4、7、8、19、20、24、29、45</a:t>
+              <a:t>资金组：1、3、4、7、8、19、20、24、29、45、32</a:t>
             </a:r>
           </a:p>
           <a:p>
@@ -4204,7 +4204,7 @@
                 <a:ea typeface="微软雅黑"/>
                 <a:cs typeface="微软雅黑"/>
               </a:rPr>
-              <a:t>销售组：5、13、21、25、33、43</a:t>
+              <a:t>销售组：5、13、21、25、33、43、30</a:t>
             </a:r>
           </a:p>
           <a:p>
@@ -4222,7 +4222,7 @@
                 <a:ea typeface="微软雅黑"/>
                 <a:cs typeface="微软雅黑"/>
               </a:rPr>
-              <a:t>费用组：6、9、15、16、22、26、28、34、35、37</a:t>
+              <a:t>费用组：6、9、15、16、22、26、28、34、35、37、27、39、40、41、44</a:t>
             </a:r>
           </a:p>
           <a:p>
@@ -4276,7 +4276,7 @@
                 <a:ea typeface="微软雅黑"/>
                 <a:cs typeface="微软雅黑"/>
               </a:rPr>
-              <a:t>前一天群里只发这一页的合影或截图。</a:t>
+              <a:t>27 交税报销水电进费用组，32 备用金进资金组，30 营业外收入进销售组。利润必须全班写。前一天群里只发这一页的合影或截图。</a:t>
             </a:r>
           </a:p>
         </p:txBody>
